--- a/templates/concept_output/概念方案.pptx
+++ b/templates/concept_output/概念方案.pptx
@@ -4573,7 +4573,7 @@
               </a:defRPr>
             </a:pPr>
             <a:r>
-              <a:t>核心理念: 以通透流畅的动线为核心，优化各功能区布局，兼顾空间利用与视觉舒适度</a:t>
+              <a:t>核心理念: 以开放式LDK为核心，优化采光与动线，打造通透舒适的家庭核心区</a:t>
             </a:r>
           </a:p>
         </p:txBody>
@@ -4643,7 +4643,7 @@
               </a:defRPr>
             </a:pPr>
             <a:r>
-              <a:t>  沙发靠西墙放置，L型布艺沙发，尺寸建议2800×1800，避开西墙可能的立柱</a:t>
+              <a:t>  沙发靠西墙放置，L型布艺沙发，尺寸建议2800×1800，避免遮挡南向采光</a:t>
             </a:r>
           </a:p>
         </p:txBody>
@@ -4678,7 +4678,7 @@
               </a:defRPr>
             </a:pPr>
             <a:r>
-              <a:t>  电视墙设在东墙，做整面收纳柜，深度400mm，搭配投影幕布，利用东墙完整面</a:t>
+              <a:t>  电视墙设在东墙做整面收纳柜，深度400mm，搭配投影幕布，保持墙面简洁</a:t>
             </a:r>
           </a:p>
         </p:txBody>
@@ -4713,7 +4713,7 @@
               </a:defRPr>
             </a:pPr>
             <a:r>
-              <a:t>  南侧落地窗前保留1200mm通道，确保采光通透和窗帘安装空间</a:t>
+              <a:t>  南侧落地窗前保留1200mm通道，保持采光通透，可放置矮柜或休闲椅</a:t>
             </a:r>
           </a:p>
         </p:txBody>
@@ -4748,7 +4748,7 @@
               </a:defRPr>
             </a:pPr>
             <a:r>
-              <a:t>  如有梁在客厅中部，可做局部吊顶隐藏，或利用梁下空间设置装饰柜</a:t>
+              <a:t>  客厅与厨房之间可设置半高隔断或吧台，增加空间互动</a:t>
             </a:r>
           </a:p>
         </p:txBody>
@@ -4888,7 +4888,7 @@
               </a:defRPr>
             </a:pPr>
             <a:r>
-              <a:t>  落地灯  [直径400]  金属+布艺灯罩</a:t>
+              <a:t>  落地灯  [φ400]  金属+布艺</a:t>
             </a:r>
           </a:p>
         </p:txBody>
@@ -4923,7 +4923,7 @@
               </a:defRPr>
             </a:pPr>
             <a:r>
-              <a:t>  ⚠ 注意西墙和东墙是否有结构柱，如有需在沙发和电视柜布置时留出柱体包覆空间；南窗建议使用电动窗帘，方便操作</a:t>
+              <a:t>  ⚠ 梁结构位于客厅与厨房交界处，吊顶可做局部平顶或弧形过渡，避免压抑</a:t>
             </a:r>
           </a:p>
         </p:txBody>
@@ -4993,7 +4993,7 @@
               </a:defRPr>
             </a:pPr>
             <a:r>
-              <a:t>  采用U型橱柜布局，沿东、北、西三面墙布置，增加操作台面和储物空间</a:t>
+              <a:t>  采用U型橱柜布局，充分利用三面墙体，操作台面连贯</a:t>
             </a:r>
           </a:p>
         </p:txBody>
